--- a/ppt/RAG07-LangChain-Chatbot.pptx
+++ b/ppt/RAG07-LangChain-Chatbot.pptx
@@ -5,10 +5,10 @@
     <p:sldMasterId id="2147483653" r:id="rId1"/>
   </p:sldMasterIdLst>
   <p:notesMasterIdLst>
-    <p:notesMasterId r:id="rId12"/>
+    <p:notesMasterId r:id="rId13"/>
   </p:notesMasterIdLst>
   <p:handoutMasterIdLst>
-    <p:handoutMasterId r:id="rId13"/>
+    <p:handoutMasterId r:id="rId14"/>
   </p:handoutMasterIdLst>
   <p:sldIdLst>
     <p:sldId id="264" r:id="rId2"/>
@@ -21,6 +21,7 @@
     <p:sldId id="273" r:id="rId9"/>
     <p:sldId id="271" r:id="rId10"/>
     <p:sldId id="274" r:id="rId11"/>
+    <p:sldId id="276" r:id="rId12"/>
   </p:sldIdLst>
   <p:sldSz cx="9144000" cy="6858000" type="screen4x3"/>
   <p:notesSz cx="6648450" cy="9782175"/>
@@ -3961,6 +3962,156 @@
     <p:extLst>
       <p:ext uri="{BB962C8B-B14F-4D97-AF65-F5344CB8AC3E}">
         <p14:creationId xmlns:p14="http://schemas.microsoft.com/office/powerpoint/2010/main" val="330541178"/>
+      </p:ext>
+    </p:extLst>
+  </p:cSld>
+  <p:clrMapOvr>
+    <a:masterClrMapping/>
+  </p:clrMapOvr>
+</p:sld>
+</file>
+
+<file path=ppt/slides/slide11.xml><?xml version="1.0" encoding="utf-8"?>
+<p:sld xmlns:a="http://schemas.openxmlformats.org/drawingml/2006/main" xmlns:r="http://schemas.openxmlformats.org/officeDocument/2006/relationships" xmlns:p="http://schemas.openxmlformats.org/presentationml/2006/main">
+  <p:cSld>
+    <p:spTree>
+      <p:nvGrpSpPr>
+        <p:cNvPr id="1" name=""/>
+        <p:cNvGrpSpPr/>
+        <p:nvPr/>
+      </p:nvGrpSpPr>
+      <p:grpSpPr>
+        <a:xfrm>
+          <a:off x="0" y="0"/>
+          <a:ext cx="0" cy="0"/>
+          <a:chOff x="0" y="0"/>
+          <a:chExt cx="0" cy="0"/>
+        </a:xfrm>
+      </p:grpSpPr>
+      <p:sp>
+        <p:nvSpPr>
+          <p:cNvPr id="2" name="Titre 1">
+            <a:extLst>
+              <a:ext uri="{FF2B5EF4-FFF2-40B4-BE49-F238E27FC236}">
+                <a16:creationId xmlns:a16="http://schemas.microsoft.com/office/drawing/2014/main" id="{65E08FA9-7326-9346-C440-94E27D702299}"/>
+              </a:ext>
+            </a:extLst>
+          </p:cNvPr>
+          <p:cNvSpPr>
+            <a:spLocks noGrp="1"/>
+          </p:cNvSpPr>
+          <p:nvPr>
+            <p:ph type="title"/>
+          </p:nvPr>
+        </p:nvSpPr>
+        <p:spPr/>
+        <p:txBody>
+          <a:bodyPr/>
+          <a:lstStyle/>
+          <a:p>
+            <a:r>
+              <a:rPr lang="fr-FR" dirty="0"/>
+              <a:t>Smith Hub</a:t>
+            </a:r>
+          </a:p>
+        </p:txBody>
+      </p:sp>
+      <p:sp>
+        <p:nvSpPr>
+          <p:cNvPr id="3" name="Espace réservé du contenu 2">
+            <a:extLst>
+              <a:ext uri="{FF2B5EF4-FFF2-40B4-BE49-F238E27FC236}">
+                <a16:creationId xmlns:a16="http://schemas.microsoft.com/office/drawing/2014/main" id="{31BF4BDC-421F-4748-8207-85E0F5885D00}"/>
+              </a:ext>
+            </a:extLst>
+          </p:cNvPr>
+          <p:cNvSpPr>
+            <a:spLocks noGrp="1"/>
+          </p:cNvSpPr>
+          <p:nvPr>
+            <p:ph idx="1"/>
+          </p:nvPr>
+        </p:nvSpPr>
+        <p:spPr/>
+        <p:txBody>
+          <a:bodyPr/>
+          <a:lstStyle/>
+          <a:p>
+            <a:r>
+              <a:rPr lang="fr-FR" dirty="0"/>
+              <a:t>Smith Hub est un cloud </a:t>
+            </a:r>
+            <a:r>
+              <a:rPr lang="fr-FR" dirty="0" err="1"/>
+              <a:t>Langchain</a:t>
+            </a:r>
+            <a:r>
+              <a:rPr lang="fr-FR" dirty="0"/>
+              <a:t> contenant  une énorme base de prompt LLM</a:t>
+            </a:r>
+          </a:p>
+          <a:p>
+            <a:pPr lvl="1"/>
+            <a:r>
+              <a:rPr lang="fr-FR" dirty="0">
+                <a:hlinkClick r:id="rId2"/>
+              </a:rPr>
+              <a:t>https://smith.langchain.com/hub</a:t>
+            </a:r>
+            <a:endParaRPr lang="fr-FR" dirty="0"/>
+          </a:p>
+          <a:p>
+            <a:r>
+              <a:rPr lang="fr-FR" dirty="0"/>
+              <a:t>Hub RLM est un cloud </a:t>
+            </a:r>
+            <a:r>
+              <a:rPr lang="fr-FR" dirty="0" err="1"/>
+              <a:t>Langchain</a:t>
+            </a:r>
+            <a:r>
+              <a:rPr lang="fr-FR" dirty="0"/>
+              <a:t> qui contient de nombreux </a:t>
+            </a:r>
+            <a:r>
+              <a:rPr lang="fr-FR" dirty="0" err="1"/>
+              <a:t>templates</a:t>
+            </a:r>
+            <a:r>
+              <a:rPr lang="fr-FR" dirty="0"/>
+              <a:t> de </a:t>
+            </a:r>
+            <a:r>
+              <a:rPr lang="fr-FR" dirty="0" err="1"/>
+              <a:t>chatbot</a:t>
+            </a:r>
+            <a:r>
+              <a:rPr lang="fr-FR" dirty="0"/>
+              <a:t> déjà programmés</a:t>
+            </a:r>
+          </a:p>
+          <a:p>
+            <a:pPr lvl="1"/>
+            <a:r>
+              <a:rPr lang="fr-FR" dirty="0">
+                <a:hlinkClick r:id="rId3"/>
+              </a:rPr>
+              <a:t>https://smith.langchain.com/hub/rlm</a:t>
+            </a:r>
+            <a:endParaRPr lang="fr-FR" dirty="0"/>
+          </a:p>
+          <a:p>
+            <a:endParaRPr lang="fr-FR" dirty="0"/>
+          </a:p>
+          <a:p>
+            <a:endParaRPr lang="fr-FR" dirty="0"/>
+          </a:p>
+        </p:txBody>
+      </p:sp>
+    </p:spTree>
+    <p:extLst>
+      <p:ext uri="{BB962C8B-B14F-4D97-AF65-F5344CB8AC3E}">
+        <p14:creationId xmlns:p14="http://schemas.microsoft.com/office/powerpoint/2010/main" val="2811439210"/>
       </p:ext>
     </p:extLst>
   </p:cSld>

--- a/ppt/RAG07-LangChain-Chatbot.pptx
+++ b/ppt/RAG07-LangChain-Chatbot.pptx
@@ -5,10 +5,10 @@
     <p:sldMasterId id="2147483653" r:id="rId1"/>
   </p:sldMasterIdLst>
   <p:notesMasterIdLst>
-    <p:notesMasterId r:id="rId13"/>
+    <p:notesMasterId r:id="rId14"/>
   </p:notesMasterIdLst>
   <p:handoutMasterIdLst>
-    <p:handoutMasterId r:id="rId14"/>
+    <p:handoutMasterId r:id="rId15"/>
   </p:handoutMasterIdLst>
   <p:sldIdLst>
     <p:sldId id="264" r:id="rId2"/>
@@ -22,6 +22,7 @@
     <p:sldId id="271" r:id="rId10"/>
     <p:sldId id="274" r:id="rId11"/>
     <p:sldId id="276" r:id="rId12"/>
+    <p:sldId id="277" r:id="rId13"/>
   </p:sldIdLst>
   <p:sldSz cx="9144000" cy="6858000" type="screen4x3"/>
   <p:notesSz cx="6648450" cy="9782175"/>
@@ -4112,6 +4113,129 @@
     <p:extLst>
       <p:ext uri="{BB962C8B-B14F-4D97-AF65-F5344CB8AC3E}">
         <p14:creationId xmlns:p14="http://schemas.microsoft.com/office/powerpoint/2010/main" val="2811439210"/>
+      </p:ext>
+    </p:extLst>
+  </p:cSld>
+  <p:clrMapOvr>
+    <a:masterClrMapping/>
+  </p:clrMapOvr>
+</p:sld>
+</file>
+
+<file path=ppt/slides/slide12.xml><?xml version="1.0" encoding="utf-8"?>
+<p:sld xmlns:a="http://schemas.openxmlformats.org/drawingml/2006/main" xmlns:r="http://schemas.openxmlformats.org/officeDocument/2006/relationships" xmlns:p="http://schemas.openxmlformats.org/presentationml/2006/main">
+  <p:cSld>
+    <p:spTree>
+      <p:nvGrpSpPr>
+        <p:cNvPr id="1" name=""/>
+        <p:cNvGrpSpPr/>
+        <p:nvPr/>
+      </p:nvGrpSpPr>
+      <p:grpSpPr>
+        <a:xfrm>
+          <a:off x="0" y="0"/>
+          <a:ext cx="0" cy="0"/>
+          <a:chOff x="0" y="0"/>
+          <a:chExt cx="0" cy="0"/>
+        </a:xfrm>
+      </p:grpSpPr>
+      <p:sp>
+        <p:nvSpPr>
+          <p:cNvPr id="2" name="Titre 1">
+            <a:extLst>
+              <a:ext uri="{FF2B5EF4-FFF2-40B4-BE49-F238E27FC236}">
+                <a16:creationId xmlns:a16="http://schemas.microsoft.com/office/drawing/2014/main" id="{4BF4247B-0791-023F-3DCC-3F4A2BEF7644}"/>
+              </a:ext>
+            </a:extLst>
+          </p:cNvPr>
+          <p:cNvSpPr>
+            <a:spLocks noGrp="1"/>
+          </p:cNvSpPr>
+          <p:nvPr>
+            <p:ph type="title"/>
+          </p:nvPr>
+        </p:nvSpPr>
+        <p:spPr/>
+        <p:txBody>
+          <a:bodyPr/>
+          <a:lstStyle/>
+          <a:p>
+            <a:r>
+              <a:rPr lang="fr-FR" dirty="0"/>
+              <a:t>Sorties structurées</a:t>
+            </a:r>
+          </a:p>
+        </p:txBody>
+      </p:sp>
+      <p:sp>
+        <p:nvSpPr>
+          <p:cNvPr id="3" name="Espace réservé du contenu 2">
+            <a:extLst>
+              <a:ext uri="{FF2B5EF4-FFF2-40B4-BE49-F238E27FC236}">
+                <a16:creationId xmlns:a16="http://schemas.microsoft.com/office/drawing/2014/main" id="{945109C4-B545-B881-D636-7F5873F95368}"/>
+              </a:ext>
+            </a:extLst>
+          </p:cNvPr>
+          <p:cNvSpPr>
+            <a:spLocks noGrp="1"/>
+          </p:cNvSpPr>
+          <p:nvPr>
+            <p:ph idx="1"/>
+          </p:nvPr>
+        </p:nvSpPr>
+        <p:spPr/>
+        <p:txBody>
+          <a:bodyPr/>
+          <a:lstStyle/>
+          <a:p>
+            <a:r>
+              <a:rPr lang="fr-FR" dirty="0"/>
+              <a:t>Il est possible de structurer les réponses en JSON</a:t>
+            </a:r>
+          </a:p>
+          <a:p>
+            <a:pPr lvl="1"/>
+            <a:r>
+              <a:rPr lang="fr-FR" dirty="0"/>
+              <a:t>Utilisation de code OO</a:t>
+            </a:r>
+          </a:p>
+        </p:txBody>
+      </p:sp>
+      <p:pic>
+        <p:nvPicPr>
+          <p:cNvPr id="5" name="Image 4">
+            <a:extLst>
+              <a:ext uri="{FF2B5EF4-FFF2-40B4-BE49-F238E27FC236}">
+                <a16:creationId xmlns:a16="http://schemas.microsoft.com/office/drawing/2014/main" id="{B7B37670-1653-9976-0876-AA185143CDD1}"/>
+              </a:ext>
+            </a:extLst>
+          </p:cNvPr>
+          <p:cNvPicPr>
+            <a:picLocks noChangeAspect="1"/>
+          </p:cNvPicPr>
+          <p:nvPr/>
+        </p:nvPicPr>
+        <p:blipFill>
+          <a:blip r:embed="rId2"/>
+          <a:stretch>
+            <a:fillRect/>
+          </a:stretch>
+        </p:blipFill>
+        <p:spPr>
+          <a:xfrm>
+            <a:off x="1403648" y="3043031"/>
+            <a:ext cx="7353601" cy="2435662"/>
+          </a:xfrm>
+          <a:prstGeom prst="rect">
+            <a:avLst/>
+          </a:prstGeom>
+        </p:spPr>
+      </p:pic>
+    </p:spTree>
+    <p:extLst>
+      <p:ext uri="{BB962C8B-B14F-4D97-AF65-F5344CB8AC3E}">
+        <p14:creationId xmlns:p14="http://schemas.microsoft.com/office/powerpoint/2010/main" val="2360085631"/>
       </p:ext>
     </p:extLst>
   </p:cSld>
